--- a/kursovaya/final/Курсовая Богатырев.pptx
+++ b/kursovaya/final/Курсовая Богатырев.pptx
@@ -4818,34 +4818,12 @@
       </p:sp>
       <p:pic>
         <p:nvPicPr>
-          <p:cNvPr id="4" name="Рисунок 3"/>
+          <p:cNvPr id="5" name="Рисунок 4"/>
           <p:cNvPicPr/>
           <p:nvPr/>
         </p:nvPicPr>
         <p:blipFill>
           <a:blip r:embed="rId2"/>
-          <a:stretch>
-            <a:fillRect/>
-          </a:stretch>
-        </p:blipFill>
-        <p:spPr>
-          <a:xfrm>
-            <a:off x="323528" y="1104162"/>
-            <a:ext cx="2448272" cy="2944722"/>
-          </a:xfrm>
-          <a:prstGeom prst="rect">
-            <a:avLst/>
-          </a:prstGeom>
-        </p:spPr>
-      </p:pic>
-      <p:pic>
-        <p:nvPicPr>
-          <p:cNvPr id="5" name="Рисунок 4"/>
-          <p:cNvPicPr/>
-          <p:nvPr/>
-        </p:nvPicPr>
-        <p:blipFill>
-          <a:blip r:embed="rId3"/>
           <a:stretch>
             <a:fillRect/>
           </a:stretch>
@@ -4867,7 +4845,7 @@
           <p:nvPr/>
         </p:nvPicPr>
         <p:blipFill>
-          <a:blip r:embed="rId4"/>
+          <a:blip r:embed="rId3"/>
           <a:stretch>
             <a:fillRect/>
           </a:stretch>
@@ -4889,7 +4867,7 @@
           <p:nvPr/>
         </p:nvPicPr>
         <p:blipFill>
-          <a:blip r:embed="rId5"/>
+          <a:blip r:embed="rId4"/>
           <a:stretch>
             <a:fillRect/>
           </a:stretch>
@@ -4911,7 +4889,7 @@
           <p:nvPr/>
         </p:nvPicPr>
         <p:blipFill>
-          <a:blip r:embed="rId6"/>
+          <a:blip r:embed="rId5"/>
           <a:stretch>
             <a:fillRect/>
           </a:stretch>
@@ -4924,6 +4902,47 @@
           <a:prstGeom prst="rect">
             <a:avLst/>
           </a:prstGeom>
+        </p:spPr>
+      </p:pic>
+      <p:pic>
+        <p:nvPicPr>
+          <p:cNvPr id="1026" name="Picture 2" descr="C:\Users\priko\Downloads\s.png"/>
+          <p:cNvPicPr>
+            <a:picLocks noChangeAspect="1" noChangeArrowheads="1"/>
+          </p:cNvPicPr>
+          <p:nvPr/>
+        </p:nvPicPr>
+        <p:blipFill>
+          <a:blip r:embed="rId6">
+            <a:extLst>
+              <a:ext uri="{28A0092B-C50C-407E-A947-70E740481C1C}">
+                <a14:useLocalDpi xmlns:a14="http://schemas.microsoft.com/office/drawing/2010/main" val="0"/>
+              </a:ext>
+            </a:extLst>
+          </a:blip>
+          <a:srcRect/>
+          <a:stretch>
+            <a:fillRect/>
+          </a:stretch>
+        </p:blipFill>
+        <p:spPr bwMode="auto">
+          <a:xfrm>
+            <a:off x="179512" y="930778"/>
+            <a:ext cx="2814654" cy="3114714"/>
+          </a:xfrm>
+          <a:prstGeom prst="rect">
+            <a:avLst/>
+          </a:prstGeom>
+          <a:noFill/>
+          <a:extLst>
+            <a:ext uri="{909E8E84-426E-40DD-AFC4-6F175D3DCCD1}">
+              <a14:hiddenFill xmlns:a14="http://schemas.microsoft.com/office/drawing/2010/main">
+                <a:solidFill>
+                  <a:srgbClr val="FFFFFF"/>
+                </a:solidFill>
+              </a14:hiddenFill>
+            </a:ext>
+          </a:extLst>
         </p:spPr>
       </p:pic>
     </p:spTree>
@@ -5142,7 +5161,6 @@
               <a:rPr lang="ru-RU" dirty="0"/>
               <a:t>Система закрывает два главных бизнес-процесса.</a:t>
             </a:r>
-            <a:endParaRPr lang="ru-RU" dirty="0"/>
           </a:p>
         </p:txBody>
       </p:sp>
@@ -5418,7 +5436,6 @@
               <a:rPr lang="ru-RU" dirty="0"/>
               <a:t>Система выдаёт электронный полис.</a:t>
             </a:r>
-            <a:endParaRPr lang="ru-RU" dirty="0"/>
           </a:p>
         </p:txBody>
       </p:sp>
@@ -6283,7 +6300,6 @@
               <a:rPr lang="ru-RU" dirty="0"/>
               <a:t>Показал, как движутся данные между процессами и хранилищами: от заявки клиента до выплаты.</a:t>
             </a:r>
-            <a:endParaRPr lang="ru-RU" dirty="0"/>
           </a:p>
         </p:txBody>
       </p:sp>
@@ -6924,7 +6940,6 @@
               <a:rPr lang="ru-RU" dirty="0"/>
               <a:t>без дублирования и противоречий.</a:t>
             </a:r>
-            <a:endParaRPr lang="ru-RU" dirty="0"/>
           </a:p>
         </p:txBody>
       </p:sp>

--- a/kursovaya/final/Курсовая Богатырев.pptx
+++ b/kursovaya/final/Курсовая Богатырев.pptx
@@ -114,6 +114,22 @@
       </a:defRPr>
     </a:lvl9pPr>
   </p:defaultTextStyle>
+  <p:extLst>
+    <p:ext uri="{EFAFB233-063F-42B5-8137-9DF3F51BA10A}">
+      <p15:sldGuideLst xmlns:p15="http://schemas.microsoft.com/office/powerpoint/2012/main">
+        <p15:guide id="1" orient="horz" pos="2160">
+          <p15:clr>
+            <a:srgbClr val="A4A3A4"/>
+          </p15:clr>
+        </p15:guide>
+        <p15:guide id="2" pos="2880">
+          <p15:clr>
+            <a:srgbClr val="A4A3A4"/>
+          </p15:clr>
+        </p15:guide>
+      </p15:sldGuideLst>
+    </p:ext>
+  </p:extLst>
 </p:presentation>
 </file>
 
@@ -4476,9 +4492,10 @@
           <a:lstStyle/>
           <a:p>
             <a:r>
-              <a:rPr lang="ru-RU" sz="4000" dirty="0"/>
+              <a:rPr lang="ru-RU" sz="3200" dirty="0" smtClean="0"/>
               <a:t>Проектирование информационной системы «Страховая компания»</a:t>
             </a:r>
+            <a:endParaRPr lang="ru-RU" sz="3200" dirty="0"/>
           </a:p>
         </p:txBody>
       </p:sp>
@@ -4499,30 +4516,172 @@
           </a:xfrm>
         </p:spPr>
         <p:txBody>
-          <a:bodyPr/>
+          <a:bodyPr>
+            <a:normAutofit/>
+          </a:bodyPr>
           <a:lstStyle/>
           <a:p>
             <a:pPr algn="r"/>
             <a:r>
-              <a:rPr lang="ru-RU" dirty="0" smtClean="0"/>
-              <a:t>Группа </a:t>
-            </a:r>
-            <a:r>
-              <a:rPr lang="ru-RU" dirty="0" err="1" smtClean="0"/>
-              <a:t>ИСиП</a:t>
-            </a:r>
-            <a:r>
-              <a:rPr lang="ru-RU" dirty="0" smtClean="0"/>
-              <a:t> 25-11-1</a:t>
+              <a:rPr lang="ru-RU" sz="1600" dirty="0" smtClean="0"/>
+              <a:t>Выполнил</a:t>
+            </a:r>
+            <a:r>
+              <a:rPr lang="en-US" sz="1600" dirty="0" smtClean="0"/>
+              <a:t>: </a:t>
+            </a:r>
+            <a:r>
+              <a:rPr lang="ru-RU" sz="1600" dirty="0" smtClean="0"/>
+              <a:t>Богатырев М.А.</a:t>
             </a:r>
           </a:p>
           <a:p>
             <a:pPr algn="r"/>
             <a:r>
-              <a:rPr lang="ru-RU" dirty="0" smtClean="0"/>
-              <a:t>Богатырев Максим</a:t>
-            </a:r>
-            <a:endParaRPr lang="ru-RU" dirty="0"/>
+              <a:rPr lang="ru-RU" sz="1600" dirty="0" smtClean="0"/>
+              <a:t>Студент 1 курса очной формы обучения,</a:t>
+            </a:r>
+          </a:p>
+          <a:p>
+            <a:pPr algn="r"/>
+            <a:r>
+              <a:rPr lang="ru-RU" sz="1600" dirty="0" smtClean="0"/>
+              <a:t>Группы ИСиП 25-11-1</a:t>
+            </a:r>
+          </a:p>
+          <a:p>
+            <a:pPr algn="r"/>
+            <a:r>
+              <a:rPr lang="ru-RU" sz="1600" dirty="0" smtClean="0"/>
+              <a:t>Проверила: Гончарова Т.В., должность</a:t>
+            </a:r>
+            <a:r>
+              <a:rPr lang="en-US" sz="1600" dirty="0" smtClean="0"/>
+              <a:t>:</a:t>
+            </a:r>
+            <a:endParaRPr lang="ru-RU" sz="1600" dirty="0" smtClean="0"/>
+          </a:p>
+          <a:p>
+            <a:pPr algn="r"/>
+            <a:r>
+              <a:rPr lang="ru-RU" sz="1600" dirty="0" smtClean="0"/>
+              <a:t>Преподаватель проф. дисциплин</a:t>
+            </a:r>
+            <a:endParaRPr lang="ru-RU" sz="1600" dirty="0"/>
+          </a:p>
+        </p:txBody>
+      </p:sp>
+      <p:sp>
+        <p:nvSpPr>
+          <p:cNvPr id="4" name="Прямоугольник 3"/>
+          <p:cNvSpPr/>
+          <p:nvPr/>
+        </p:nvSpPr>
+        <p:spPr>
+          <a:xfrm>
+            <a:off x="0" y="369651"/>
+            <a:ext cx="9144000" cy="1366528"/>
+          </a:xfrm>
+          <a:prstGeom prst="rect">
+            <a:avLst/>
+          </a:prstGeom>
+        </p:spPr>
+        <p:txBody>
+          <a:bodyPr wrap="square">
+            <a:spAutoFit/>
+          </a:bodyPr>
+          <a:lstStyle/>
+          <a:p>
+            <a:pPr algn="ctr">
+              <a:lnSpc>
+                <a:spcPct val="115000"/>
+              </a:lnSpc>
+              <a:spcAft>
+                <a:spcPts val="1000"/>
+              </a:spcAft>
+            </a:pPr>
+            <a:r>
+              <a:rPr lang="ru-RU" dirty="0">
+                <a:ea typeface="Calibri" panose="020F0502020204030204" pitchFamily="34" charset="0"/>
+                <a:cs typeface="Times New Roman" panose="02020603050405020304" pitchFamily="18" charset="0"/>
+              </a:rPr>
+              <a:t>Государственное автономное профессиональное учреждение </a:t>
+            </a:r>
+            <a:br>
+              <a:rPr lang="ru-RU" dirty="0">
+                <a:ea typeface="Calibri" panose="020F0502020204030204" pitchFamily="34" charset="0"/>
+                <a:cs typeface="Times New Roman" panose="02020603050405020304" pitchFamily="18" charset="0"/>
+              </a:rPr>
+            </a:br>
+            <a:r>
+              <a:rPr lang="ru-RU" dirty="0">
+                <a:ea typeface="Calibri" panose="020F0502020204030204" pitchFamily="34" charset="0"/>
+                <a:cs typeface="Times New Roman" panose="02020603050405020304" pitchFamily="18" charset="0"/>
+              </a:rPr>
+              <a:t>Тюменской области </a:t>
+            </a:r>
+            <a:br>
+              <a:rPr lang="ru-RU" dirty="0">
+                <a:ea typeface="Calibri" panose="020F0502020204030204" pitchFamily="34" charset="0"/>
+                <a:cs typeface="Times New Roman" panose="02020603050405020304" pitchFamily="18" charset="0"/>
+              </a:rPr>
+            </a:br>
+            <a:r>
+              <a:rPr lang="ru-RU" dirty="0">
+                <a:ea typeface="Calibri" panose="020F0502020204030204" pitchFamily="34" charset="0"/>
+                <a:cs typeface="Times New Roman" panose="02020603050405020304" pitchFamily="18" charset="0"/>
+              </a:rPr>
+              <a:t>«ТЮМЕНСКИЙ ТЕХНИКУМ СТРОИТЕЛЬНОЙ ИНДУСТРИИ И ГОРОДСКОГО ХОЗЯЙСТВА»</a:t>
+            </a:r>
+            <a:endParaRPr lang="ru-RU" sz="1400" dirty="0">
+              <a:latin typeface="Calibri" panose="020F0502020204030204" pitchFamily="34" charset="0"/>
+              <a:ea typeface="Calibri" panose="020F0502020204030204" pitchFamily="34" charset="0"/>
+              <a:cs typeface="Times New Roman" panose="02020603050405020304" pitchFamily="18" charset="0"/>
+            </a:endParaRPr>
+          </a:p>
+        </p:txBody>
+      </p:sp>
+      <p:sp>
+        <p:nvSpPr>
+          <p:cNvPr id="5" name="Прямоугольник 4"/>
+          <p:cNvSpPr/>
+          <p:nvPr/>
+        </p:nvSpPr>
+        <p:spPr>
+          <a:xfrm>
+            <a:off x="2286000" y="6168605"/>
+            <a:ext cx="4572000" cy="390684"/>
+          </a:xfrm>
+          <a:prstGeom prst="rect">
+            <a:avLst/>
+          </a:prstGeom>
+        </p:spPr>
+        <p:txBody>
+          <a:bodyPr>
+            <a:spAutoFit/>
+          </a:bodyPr>
+          <a:lstStyle/>
+          <a:p>
+            <a:pPr algn="ctr">
+              <a:lnSpc>
+                <a:spcPct val="115000"/>
+              </a:lnSpc>
+              <a:spcAft>
+                <a:spcPts val="1000"/>
+              </a:spcAft>
+            </a:pPr>
+            <a:r>
+              <a:rPr lang="ru-RU" dirty="0" smtClean="0">
+                <a:ea typeface="Calibri" panose="020F0502020204030204" pitchFamily="34" charset="0"/>
+                <a:cs typeface="Times New Roman" panose="02020603050405020304" pitchFamily="18" charset="0"/>
+              </a:rPr>
+              <a:t>г. Тюмень, 2026 г.</a:t>
+            </a:r>
+            <a:endParaRPr lang="ru-RU" sz="1400" dirty="0">
+              <a:latin typeface="Calibri" panose="020F0502020204030204" pitchFamily="34" charset="0"/>
+              <a:ea typeface="Calibri" panose="020F0502020204030204" pitchFamily="34" charset="0"/>
+              <a:cs typeface="Times New Roman" panose="02020603050405020304" pitchFamily="18" charset="0"/>
+            </a:endParaRPr>
           </a:p>
         </p:txBody>
       </p:sp>

--- a/kursovaya/final/Курсовая Богатырев.pptx
+++ b/kursovaya/final/Курсовая Богатырев.pptx
@@ -6260,12 +6260,12 @@
         <p:spPr>
           <a:xfrm>
             <a:off x="699247" y="2248347"/>
-            <a:ext cx="7833193" cy="1684709"/>
+            <a:ext cx="7833193" cy="1108645"/>
           </a:xfrm>
         </p:spPr>
         <p:txBody>
           <a:bodyPr>
-            <a:normAutofit fontScale="70000" lnSpcReduction="20000"/>
+            <a:normAutofit fontScale="47500" lnSpcReduction="20000"/>
           </a:bodyPr>
           <a:lstStyle/>
           <a:p>
@@ -6375,8 +6375,8 @@
         </p:blipFill>
         <p:spPr bwMode="auto">
           <a:xfrm>
-            <a:off x="2983561" y="3789040"/>
-            <a:ext cx="5851541" cy="3068960"/>
+            <a:off x="2983561" y="3573016"/>
+            <a:ext cx="5851541" cy="3284984"/>
           </a:xfrm>
           <a:prstGeom prst="rect">
             <a:avLst/>
@@ -6396,6 +6396,41 @@
               </a14:hiddenFill>
             </a:ext>
           </a:extLst>
+        </p:spPr>
+      </p:pic>
+      <p:pic>
+        <p:nvPicPr>
+          <p:cNvPr id="4" name="Рисунок 3"/>
+          <p:cNvPicPr>
+            <a:picLocks noChangeAspect="1"/>
+          </p:cNvPicPr>
+          <p:nvPr/>
+        </p:nvPicPr>
+        <p:blipFill>
+          <a:blip r:embed="rId3">
+            <a:extLst>
+              <a:ext uri="{28A0092B-C50C-407E-A947-70E740481C1C}">
+                <a14:useLocalDpi xmlns:a14="http://schemas.microsoft.com/office/drawing/2010/main" val="0"/>
+              </a:ext>
+            </a:extLst>
+          </a:blip>
+          <a:stretch>
+            <a:fillRect/>
+          </a:stretch>
+        </p:blipFill>
+        <p:spPr>
+          <a:xfrm>
+            <a:off x="15275" y="3980933"/>
+            <a:ext cx="2995533" cy="2160240"/>
+          </a:xfrm>
+          <a:prstGeom prst="rect">
+            <a:avLst/>
+          </a:prstGeom>
+          <a:effectLst>
+            <a:innerShdw blurRad="114300">
+              <a:prstClr val="black"/>
+            </a:innerShdw>
+          </a:effectLst>
         </p:spPr>
       </p:pic>
     </p:spTree>

--- a/kursovaya/final/Курсовая Богатырев.pptx
+++ b/kursovaya/final/Курсовая Богатырев.pptx
@@ -5317,9 +5317,14 @@
           <a:lstStyle/>
           <a:p>
             <a:r>
-              <a:rPr lang="ru-RU" dirty="0"/>
-              <a:t>Система закрывает два главных бизнес-процесса.</a:t>
-            </a:r>
+              <a:rPr lang="ru-RU" dirty="0" smtClean="0"/>
+              <a:t>Б</a:t>
+            </a:r>
+            <a:r>
+              <a:rPr lang="ru-RU" dirty="0" smtClean="0"/>
+              <a:t>изнес-процессы</a:t>
+            </a:r>
+            <a:endParaRPr lang="ru-RU" dirty="0"/>
           </a:p>
         </p:txBody>
       </p:sp>
@@ -6260,12 +6265,12 @@
         <p:spPr>
           <a:xfrm>
             <a:off x="699247" y="2248347"/>
-            <a:ext cx="7833193" cy="1108645"/>
+            <a:ext cx="7833193" cy="1324669"/>
           </a:xfrm>
         </p:spPr>
         <p:txBody>
           <a:bodyPr>
-            <a:normAutofit fontScale="47500" lnSpcReduction="20000"/>
+            <a:normAutofit fontScale="55000" lnSpcReduction="20000"/>
           </a:bodyPr>
           <a:lstStyle/>
           <a:p>
